--- a/organigramm/20250206_Organigramm_BVP_formatiert.pptx
+++ b/organigramm/20250206_Organigramm_BVP_formatiert.pptx
@@ -7712,11 +7712,6 @@
                     </a:solidFill>
                   </a:tcPr>
                 </a:tc>
-                <a:extLst>
-                  <a:ext uri="{0D108BD9-81ED-4DB2-BD59-A6C34878D82A}">
-                    <a16:rowId xmlns:a16="http://schemas.microsoft.com/office/drawing/2014/main" val="2007548013"/>
-                  </a:ext>
-                </a:extLst>
               </a:tr>
               <a:tr h="197000">
                 <a:tc>

--- a/organigramm/20250206_Organigramm_BVP_formatiert.pptx
+++ b/organigramm/20250206_Organigramm_BVP_formatiert.pptx
@@ -7361,7 +7361,6 @@
         <p:txBody>
           <a:bodyPr vert="horz" lIns="108000" tIns="54000" rIns="108000" bIns="54000" rtlCol="0" anchor="t">
             <a:noAutofit/>
-            <a:noAutofit/>
           </a:bodyPr>
           <a:lstStyle>
             <a:lvl1pPr marL="0" indent="0" algn="ctr" defTabSz="914400" rtl="0" eaLnBrk="1" latinLnBrk="0" hangingPunct="1">
@@ -7690,9 +7689,6 @@
                       <a:pPr algn="r" rtl="0" fontAlgn="ctr"/>
                       <a:r>
                         <a:rPr lang="de-DE" sz="900" b="1" i="0" u="none" strike="noStrike">
-                          <a:solidFill>
-                            <a:srgbClr val="1E1E1E"/>
-                          </a:solidFill>
                           <a:solidFill>
                             <a:schemeClr val="bg1"/>
                           </a:solidFill>
